--- a/submission/02-答辩材料.pptx
+++ b/submission/02-答辩材料.pptx
@@ -3199,8 +3199,8 @@
         </p:nvSpPr>
         <p:spPr>
           <a:xfrm>
-            <a:off x="822960" y="1965960"/>
-            <a:ext cx="10515600" cy="1005840"/>
+            <a:off x="822960" y="1828800"/>
+            <a:ext cx="10515600" cy="1188720"/>
           </a:xfrm>
           <a:prstGeom prst="rect">
             <a:avLst/>
@@ -3219,14 +3219,14 @@
               </a:lnSpc>
             </a:pPr>
             <a:r>
-              <a:rPr sz="5200" b="1">
+              <a:rPr sz="6600" b="1">
                 <a:solidFill>
                   <a:srgbClr val="FFFFFF"/>
                 </a:solidFill>
                 <a:latin typeface="Microsoft YaHei"/>
                 <a:ea typeface="Microsoft YaHei"/>
               </a:rPr>
-              <a:t>银行 AI 智能体</a:t>
+              <a:t>令行</a:t>
             </a:r>
           </a:p>
         </p:txBody>
@@ -3239,8 +3239,8 @@
         </p:nvSpPr>
         <p:spPr>
           <a:xfrm>
-            <a:off x="822960" y="3063240"/>
-            <a:ext cx="10515600" cy="640080"/>
+            <a:off x="868680" y="3127248"/>
+            <a:ext cx="10515600" cy="365760"/>
           </a:xfrm>
           <a:prstGeom prst="rect">
             <a:avLst/>
@@ -3259,6 +3259,46 @@
               </a:lnSpc>
             </a:pPr>
             <a:r>
+              <a:rPr sz="1500" b="0">
+                <a:solidFill>
+                  <a:srgbClr val="7F9BFF"/>
+                </a:solidFill>
+                <a:latin typeface="Microsoft YaHei"/>
+                <a:ea typeface="Microsoft YaHei"/>
+              </a:rPr>
+              <a:t>LINGXING · 银行 AI 智能体</a:t>
+            </a:r>
+          </a:p>
+        </p:txBody>
+      </p:sp>
+      <p:sp>
+        <p:nvSpPr>
+          <p:cNvPr id="6" name="TextBox 5"/>
+          <p:cNvSpPr txBox="1"/>
+          <p:nvPr/>
+        </p:nvSpPr>
+        <p:spPr>
+          <a:xfrm>
+            <a:off x="822960" y="3520440"/>
+            <a:ext cx="10515600" cy="640080"/>
+          </a:xfrm>
+          <a:prstGeom prst="rect">
+            <a:avLst/>
+          </a:prstGeom>
+          <a:noFill/>
+        </p:spPr>
+        <p:txBody>
+          <a:bodyPr wrap="square" anchor="t" lIns="0" rIns="0" tIns="0" bIns="0">
+            <a:spAutoFit/>
+          </a:bodyPr>
+          <a:lstStyle/>
+          <a:p>
+            <a:pPr algn="l">
+              <a:lnSpc>
+                <a:spcPct val="125000"/>
+              </a:lnSpc>
+            </a:pPr>
+            <a:r>
               <a:rPr sz="2600" b="0">
                 <a:solidFill>
                   <a:srgbClr val="C9D6F5"/>
@@ -3273,13 +3313,13 @@
       </p:sp>
       <p:cxnSp>
         <p:nvCxnSpPr>
-          <p:cNvPr id="6" name="Connector 5"/>
+          <p:cNvPr id="7" name="Connector 6"/>
           <p:cNvCxnSpPr/>
           <p:nvPr/>
         </p:nvCxnSpPr>
         <p:spPr>
           <a:xfrm>
-            <a:off x="868680" y="3886200"/>
+            <a:off x="868680" y="4206240"/>
             <a:ext cx="2971800" cy="0"/>
           </a:xfrm>
           <a:prstGeom prst="line">
@@ -3308,13 +3348,13 @@
       </p:cxnSp>
       <p:sp>
         <p:nvSpPr>
-          <p:cNvPr id="7" name="TextBox 6"/>
+          <p:cNvPr id="8" name="TextBox 7"/>
           <p:cNvSpPr txBox="1"/>
           <p:nvPr/>
         </p:nvSpPr>
         <p:spPr>
           <a:xfrm>
-            <a:off x="822960" y="4160520"/>
+            <a:off x="822960" y="4480560"/>
             <a:ext cx="10058400" cy="1097280"/>
           </a:xfrm>
           <a:prstGeom prst="rect">
@@ -3365,7 +3405,7 @@
       </p:sp>
       <p:sp>
         <p:nvSpPr>
-          <p:cNvPr id="8" name="TextBox 7"/>
+          <p:cNvPr id="9" name="TextBox 8"/>
           <p:cNvSpPr txBox="1"/>
           <p:nvPr/>
         </p:nvSpPr>
